--- a/docs/Transformer_Twin_Hackathon_v2.pptx
+++ b/docs/Transformer_Twin_Hackathon_v2.pptx
@@ -10523,7 +10523,7 @@
                   <a:schemeClr val="bg1"/>
                 </a:solidFill>
               </a:rPr>
-              <a:t>Scales in software, not in sheet metal</a:t>
+              <a:t>Built to scale</a:t>
             </a:r>
             <a:endParaRPr lang="en-US" sz="3200" dirty="0"/>
           </a:p>
@@ -10531,30 +10531,82 @@
       </p:sp>
       <p:sp>
         <p:nvSpPr>
-          <p:cNvPr id="3" name="Scale card 1"/>
-          <p:cNvSpPr/>
-          <p:nvPr/>
-        </p:nvSpPr>
-        <p:spPr>
-          <a:xfrm>
-            <a:off x="548640" y="1554480"/>
-            <a:ext cx="3502152" cy="3566160"/>
-          </a:xfrm>
-          <a:prstGeom prst="roundRect">
-            <a:avLst>
-              <a:gd name="adj" fmla="val 3133"/>
-            </a:avLst>
-          </a:prstGeom>
-          <a:solidFill>
-            <a:schemeClr val="tx2"/>
-          </a:solidFill>
-          <a:ln/>
-        </p:spPr>
-        <p:txBody>
-          <a:bodyPr/>
-          <a:lstStyle/>
-          <a:p>
-            <a:endParaRPr lang="en-IN"/>
+          <p:cNvPr id="18" name="Text 13"/>
+          <p:cNvSpPr txBox="1"/>
+          <p:nvPr/>
+        </p:nvSpPr>
+        <p:spPr>
+          <a:xfrm>
+            <a:off x="548640" y="5394960"/>
+            <a:ext cx="11094415" cy="457200"/>
+          </a:xfrm>
+          <a:prstGeom prst="rect">
+            <a:avLst/>
+          </a:prstGeom>
+          <a:noFill/>
+          <a:ln/>
+        </p:spPr>
+        <p:txBody>
+          <a:bodyPr wrap="square" lIns="0" tIns="0" rIns="0" bIns="0" rtlCol="0" anchor="t"/>
+          <a:lstStyle/>
+          <a:p>
+            <a:pPr marL="0" indent="0">
+              <a:buNone/>
+            </a:pPr>
+            <a:r>
+              <a:rPr lang="en-US" sz="1600" i="1" dirty="0">
+                <a:solidFill>
+                  <a:schemeClr val="bg1"/>
+                </a:solidFill>
+              </a:rPr>
+              <a:t>Adding the next transformer is a config change, not a build.</a:t>
+            </a:r>
+            <a:endParaRPr lang="en-US" sz="1600" dirty="0"/>
+          </a:p>
+        </p:txBody>
+      </p:sp>
+      <p:sp>
+        <p:nvSpPr>
+          <p:cNvPr id="25" name="Slide Number Placeholder 0"/>
+          <p:cNvSpPr>
+            <a:spLocks noGrp="1"/>
+          </p:cNvSpPr>
+          <p:nvPr>
+            <p:ph type="sldNum" sz="quarter" idx="4294967295"/>
+          </p:nvPr>
+        </p:nvSpPr>
+        <p:spPr>
+          <a:xfrm>
+            <a:off x="11094415" y="6446520"/>
+            <a:ext cx="548640" cy="274320"/>
+          </a:xfrm>
+          <a:prstGeom prst="rect">
+            <a:avLst/>
+          </a:prstGeom>
+          <a:extLst>
+            <a:ext uri="{C572A759-6A51-4108-AA02-DFA0A04FC94B}">
+              <ma14:wrappingTextBoxFlag xmlns:ma14="http://schemas.microsoft.com/office/mac/drawingml/2011/main" xmlns="" val="0"/>
+            </a:ext>
+          </a:extLst>
+        </p:spPr>
+        <p:txBody>
+          <a:bodyPr lIns="0" tIns="0" rIns="0" bIns="0"/>
+          <a:lstStyle>
+            <a:lvl1pPr>
+              <a:defRPr sz="1000">
+                <a:solidFill>
+                  <a:schemeClr val="bg2"/>
+                </a:solidFill>
+              </a:defRPr>
+            </a:lvl1pPr>
+          </a:lstStyle>
+          <a:p>
+            <a:pPr algn="r"/>
+            <a:fld id="{F7021451-1387-4CA6-816F-3879F97B5CBC}" type="slidenum">
+              <a:rPr lang="en-US" b="0"/>
+              <a:t>4</a:t>
+            </a:fld>
+            <a:endParaRPr lang="en-US"/>
           </a:p>
         </p:txBody>
       </p:sp>
@@ -10566,8 +10618,8 @@
         </p:nvSpPr>
         <p:spPr>
           <a:xfrm>
-            <a:off x="914400" y="1965960"/>
-            <a:ext cx="822960" cy="822960"/>
+            <a:off x="548640" y="1463040"/>
+            <a:ext cx="685800" cy="685800"/>
           </a:xfrm>
           <a:prstGeom prst="ellipse">
             <a:avLst/>
@@ -10601,8 +10653,8 @@
         </p:blipFill>
         <p:spPr>
           <a:xfrm>
-            <a:off x="1120140" y="2171700"/>
-            <a:ext cx="411480" cy="411480"/>
+            <a:off x="731520" y="1645920"/>
+            <a:ext cx="320040" cy="320040"/>
           </a:xfrm>
           <a:prstGeom prst="rect">
             <a:avLst/>
@@ -10611,14 +10663,14 @@
       </p:pic>
       <p:sp>
         <p:nvSpPr>
-          <p:cNvPr id="6" name="Text 3"/>
+          <p:cNvPr id="6" name="Scale 1 heading"/>
           <p:cNvSpPr txBox="1"/>
           <p:nvPr/>
         </p:nvSpPr>
         <p:spPr>
           <a:xfrm>
-            <a:off x="914400" y="3017520"/>
-            <a:ext cx="2770632" cy="457200"/>
+            <a:off x="1508760" y="1417320"/>
+            <a:ext cx="10058400" cy="411480"/>
           </a:xfrm>
           <a:prstGeom prst="rect">
             <a:avLst/>
@@ -10642,7 +10694,7 @@
                 <a:ea typeface="Cambria" pitchFamily="34" charset="-122"/>
                 <a:cs typeface="Cambria" pitchFamily="34" charset="-120"/>
               </a:rPr>
-              <a:t>No rig to build</a:t>
+              <a:t>One config per transformer</a:t>
             </a:r>
             <a:endParaRPr lang="en-US" sz="2200" dirty="0"/>
           </a:p>
@@ -10650,14 +10702,14 @@
       </p:sp>
       <p:sp>
         <p:nvSpPr>
-          <p:cNvPr id="7" name="Text 4"/>
+          <p:cNvPr id="7" name="Scale 1 body"/>
           <p:cNvSpPr txBox="1"/>
           <p:nvPr/>
         </p:nvSpPr>
         <p:spPr>
           <a:xfrm>
-            <a:off x="914400" y="3566160"/>
-            <a:ext cx="2770632" cy="1463040"/>
+            <a:off x="1508760" y="1828800"/>
+            <a:ext cx="10058400" cy="365760"/>
           </a:xfrm>
           <a:prstGeom prst="rect">
             <a:avLst/>
@@ -10673,12 +10725,12 @@
               <a:buNone/>
             </a:pPr>
             <a:r>
-              <a:rPr lang="en-US" sz="1500" dirty="0">
+              <a:rPr lang="en-US" sz="1600" dirty="0">
                 <a:solidFill>
                   <a:schemeClr val="bg2"/>
                 </a:solidFill>
               </a:rPr>
-              <a:t>A physical IoT model must be built, wired and calibrated for every transformer. Ours needs a new config file, not new hardware.</a:t>
+              <a:t>Ratings, alarm limits and standards live in one YAML file. A new unit is a new file.</a:t>
             </a:r>
             <a:endParaRPr lang="en-US" sz="1500" dirty="0"/>
           </a:p>
@@ -10686,43 +10738,14 @@
       </p:sp>
       <p:sp>
         <p:nvSpPr>
-          <p:cNvPr id="8" name="Scale card 2"/>
+          <p:cNvPr id="4" name="Scale 2 circle"/>
           <p:cNvSpPr/>
           <p:nvPr/>
         </p:nvSpPr>
         <p:spPr>
           <a:xfrm>
-            <a:off x="4325112" y="1554480"/>
-            <a:ext cx="3502152" cy="3566160"/>
-          </a:xfrm>
-          <a:prstGeom prst="roundRect">
-            <a:avLst>
-              <a:gd name="adj" fmla="val 3133"/>
-            </a:avLst>
-          </a:prstGeom>
-          <a:solidFill>
-            <a:schemeClr val="tx2"/>
-          </a:solidFill>
-          <a:ln/>
-        </p:spPr>
-        <p:txBody>
-          <a:bodyPr/>
-          <a:lstStyle/>
-          <a:p>
-            <a:endParaRPr lang="en-IN"/>
-          </a:p>
-        </p:txBody>
-      </p:sp>
-      <p:sp>
-        <p:nvSpPr>
-          <p:cNvPr id="9" name="Scale 2 circle"/>
-          <p:cNvSpPr/>
-          <p:nvPr/>
-        </p:nvSpPr>
-        <p:spPr>
-          <a:xfrm>
-            <a:off x="4690872" y="1965960"/>
-            <a:ext cx="822960" cy="822960"/>
+            <a:off x="548640" y="2423160"/>
+            <a:ext cx="685800" cy="685800"/>
           </a:xfrm>
           <a:prstGeom prst="ellipse">
             <a:avLst/>
@@ -10742,22 +10765,22 @@
       </p:sp>
       <p:pic>
         <p:nvPicPr>
-          <p:cNvPr id="10" name="Scale 2 icon" descr="Solution 2"/>
+          <p:cNvPr id="5" name="Scale 2 icon" descr="Solution 1"/>
           <p:cNvPicPr>
             <a:picLocks noChangeAspect="1"/>
           </p:cNvPicPr>
           <p:nvPr/>
         </p:nvPicPr>
         <p:blipFill>
-          <a:blip r:embed="rId3"/>
+          <a:blip r:embed="rId6"/>
           <a:stretch>
             <a:fillRect/>
           </a:stretch>
         </p:blipFill>
         <p:spPr>
           <a:xfrm>
-            <a:off x="4896612" y="2171700"/>
-            <a:ext cx="411480" cy="411480"/>
+            <a:off x="731520" y="2606040"/>
+            <a:ext cx="320040" cy="320040"/>
           </a:xfrm>
           <a:prstGeom prst="rect">
             <a:avLst/>
@@ -10766,14 +10789,14 @@
       </p:pic>
       <p:sp>
         <p:nvSpPr>
-          <p:cNvPr id="11" name="Text 7"/>
+          <p:cNvPr id="6" name="Scale 2 heading"/>
           <p:cNvSpPr txBox="1"/>
           <p:nvPr/>
         </p:nvSpPr>
         <p:spPr>
           <a:xfrm>
-            <a:off x="4690872" y="3017520"/>
-            <a:ext cx="2770632" cy="457200"/>
+            <a:off x="1508760" y="2377440"/>
+            <a:ext cx="10058400" cy="411480"/>
           </a:xfrm>
           <a:prstGeom prst="rect">
             <a:avLst/>
@@ -10797,7 +10820,7 @@
                 <a:ea typeface="Cambria" pitchFamily="34" charset="-122"/>
                 <a:cs typeface="Cambria" pitchFamily="34" charset="-120"/>
               </a:rPr>
-              <a:t>Real-unit accuracy</a:t>
+              <a:t>Same code for every unit</a:t>
             </a:r>
             <a:endParaRPr lang="en-US" sz="2200" dirty="0"/>
           </a:p>
@@ -10805,14 +10828,14 @@
       </p:sp>
       <p:sp>
         <p:nvSpPr>
-          <p:cNvPr id="12" name="Text 8"/>
+          <p:cNvPr id="7" name="Scale 2 body"/>
           <p:cNvSpPr txBox="1"/>
           <p:nvPr/>
         </p:nvSpPr>
         <p:spPr>
           <a:xfrm>
-            <a:off x="4690872" y="3566160"/>
-            <a:ext cx="2770632" cy="1463040"/>
+            <a:off x="1508760" y="2788920"/>
+            <a:ext cx="10058400" cy="365760"/>
           </a:xfrm>
           <a:prstGeom prst="rect">
             <a:avLst/>
@@ -10828,12 +10851,12 @@
               <a:buNone/>
             </a:pPr>
             <a:r>
-              <a:rPr lang="en-US" sz="1500" dirty="0">
+              <a:rPr lang="en-US" sz="1600" dirty="0">
                 <a:solidFill>
                   <a:schemeClr val="bg2"/>
                 </a:solidFill>
               </a:rPr>
-              <a:t>A scale model's sensors measure the scale model. Our twin runs IEC 60076-7 physics on the real unit's ratings and CPRI settings.</a:t>
+              <a:t>The 3D model, protection rules, risk engine and dashboard are shared by every twin.</a:t>
             </a:r>
             <a:endParaRPr lang="en-US" sz="1500" dirty="0"/>
           </a:p>
@@ -10841,43 +10864,14 @@
       </p:sp>
       <p:sp>
         <p:nvSpPr>
-          <p:cNvPr id="13" name="Scale card 3"/>
+          <p:cNvPr id="4" name="Scale 3 circle"/>
           <p:cNvSpPr/>
           <p:nvPr/>
         </p:nvSpPr>
         <p:spPr>
           <a:xfrm>
-            <a:off x="8101584" y="1554480"/>
-            <a:ext cx="3502152" cy="3566160"/>
-          </a:xfrm>
-          <a:prstGeom prst="roundRect">
-            <a:avLst>
-              <a:gd name="adj" fmla="val 3133"/>
-            </a:avLst>
-          </a:prstGeom>
-          <a:solidFill>
-            <a:schemeClr val="tx2"/>
-          </a:solidFill>
-          <a:ln/>
-        </p:spPr>
-        <p:txBody>
-          <a:bodyPr/>
-          <a:lstStyle/>
-          <a:p>
-            <a:endParaRPr lang="en-IN"/>
-          </a:p>
-        </p:txBody>
-      </p:sp>
-      <p:sp>
-        <p:nvSpPr>
-          <p:cNvPr id="14" name="Scale 3 circle"/>
-          <p:cNvSpPr/>
-          <p:nvPr/>
-        </p:nvSpPr>
-        <p:spPr>
-          <a:xfrm>
-            <a:off x="8467344" y="1965960"/>
-            <a:ext cx="822960" cy="822960"/>
+            <a:off x="548640" y="3383280"/>
+            <a:ext cx="685800" cy="685800"/>
           </a:xfrm>
           <a:prstGeom prst="ellipse">
             <a:avLst/>
@@ -10897,7 +10891,133 @@
       </p:sp>
       <p:pic>
         <p:nvPicPr>
-          <p:cNvPr id="15" name="Scale 3 icon" descr="Solution 3"/>
+          <p:cNvPr id="5" name="Scale 3 icon" descr="Solution 1"/>
+          <p:cNvPicPr>
+            <a:picLocks noChangeAspect="1"/>
+          </p:cNvPicPr>
+          <p:nvPr/>
+        </p:nvPicPr>
+        <p:blipFill>
+          <a:blip r:embed="rId5"/>
+          <a:stretch>
+            <a:fillRect/>
+          </a:stretch>
+        </p:blipFill>
+        <p:spPr>
+          <a:xfrm>
+            <a:off x="731520" y="3566160"/>
+            <a:ext cx="320040" cy="320040"/>
+          </a:xfrm>
+          <a:prstGeom prst="rect">
+            <a:avLst/>
+          </a:prstGeom>
+        </p:spPr>
+      </p:pic>
+      <p:sp>
+        <p:nvSpPr>
+          <p:cNvPr id="6" name="Scale 3 heading"/>
+          <p:cNvSpPr txBox="1"/>
+          <p:nvPr/>
+        </p:nvSpPr>
+        <p:spPr>
+          <a:xfrm>
+            <a:off x="1508760" y="3337560"/>
+            <a:ext cx="10058400" cy="411480"/>
+          </a:xfrm>
+          <a:prstGeom prst="rect">
+            <a:avLst/>
+          </a:prstGeom>
+          <a:noFill/>
+          <a:ln/>
+        </p:spPr>
+        <p:txBody>
+          <a:bodyPr wrap="square" lIns="0" tIns="0" rIns="0" bIns="0" rtlCol="0" anchor="t"/>
+          <a:lstStyle/>
+          <a:p>
+            <a:pPr marL="0" indent="0">
+              <a:buNone/>
+            </a:pPr>
+            <a:r>
+              <a:rPr lang="en-US" sz="2200" b="1" dirty="0">
+                <a:solidFill>
+                  <a:schemeClr val="accent1"/>
+                </a:solidFill>
+                <a:latin typeface="Cambria" pitchFamily="34" charset="0"/>
+                <a:ea typeface="Cambria" pitchFamily="34" charset="-122"/>
+                <a:cs typeface="Cambria" pitchFamily="34" charset="-120"/>
+              </a:rPr>
+              <a:t>Standard hardware</a:t>
+            </a:r>
+            <a:endParaRPr lang="en-US" sz="2200" dirty="0"/>
+          </a:p>
+        </p:txBody>
+      </p:sp>
+      <p:sp>
+        <p:nvSpPr>
+          <p:cNvPr id="7" name="Scale 3 body"/>
+          <p:cNvSpPr txBox="1"/>
+          <p:nvPr/>
+        </p:nvSpPr>
+        <p:spPr>
+          <a:xfrm>
+            <a:off x="1508760" y="3749040"/>
+            <a:ext cx="10058400" cy="365760"/>
+          </a:xfrm>
+          <a:prstGeom prst="rect">
+            <a:avLst/>
+          </a:prstGeom>
+          <a:noFill/>
+          <a:ln/>
+        </p:spPr>
+        <p:txBody>
+          <a:bodyPr wrap="square" lIns="0" tIns="0" rIns="0" bIns="0" rtlCol="0" anchor="t"/>
+          <a:lstStyle/>
+          <a:p>
+            <a:pPr marL="0" indent="0">
+              <a:buNone/>
+            </a:pPr>
+            <a:r>
+              <a:rPr lang="en-US" sz="1600" dirty="0">
+                <a:solidFill>
+                  <a:schemeClr val="bg2"/>
+                </a:solidFill>
+              </a:rPr>
+              <a:t>Every signal maps to off-the-shelf CTs, meters and sensors over Modbus.</a:t>
+            </a:r>
+            <a:endParaRPr lang="en-US" sz="1500" dirty="0"/>
+          </a:p>
+        </p:txBody>
+      </p:sp>
+      <p:sp>
+        <p:nvSpPr>
+          <p:cNvPr id="4" name="Scale 4 circle"/>
+          <p:cNvSpPr/>
+          <p:nvPr/>
+        </p:nvSpPr>
+        <p:spPr>
+          <a:xfrm>
+            <a:off x="548640" y="4343400"/>
+            <a:ext cx="685800" cy="685800"/>
+          </a:xfrm>
+          <a:prstGeom prst="ellipse">
+            <a:avLst/>
+          </a:prstGeom>
+          <a:solidFill>
+            <a:schemeClr val="accent6"/>
+          </a:solidFill>
+          <a:ln/>
+        </p:spPr>
+        <p:txBody>
+          <a:bodyPr/>
+          <a:lstStyle/>
+          <a:p>
+            <a:endParaRPr lang="en-IN"/>
+          </a:p>
+        </p:txBody>
+      </p:sp>
+      <p:pic>
+        <p:nvPicPr>
+          <p:cNvPr id="15" name="Scale 4 icon" descr="Solution 3"/>
           <p:cNvPicPr>
             <a:picLocks noChangeAspect="1"/>
           </p:cNvPicPr>
@@ -10911,8 +11031,8 @@
         </p:blipFill>
         <p:spPr>
           <a:xfrm>
-            <a:off x="8673084" y="2171700"/>
-            <a:ext cx="411480" cy="411480"/>
+            <a:off x="731520" y="4526280"/>
+            <a:ext cx="320040" cy="320040"/>
           </a:xfrm>
           <a:prstGeom prst="rect">
             <a:avLst/>
@@ -10921,14 +11041,14 @@
       </p:pic>
       <p:sp>
         <p:nvSpPr>
-          <p:cNvPr id="16" name="Text 11"/>
+          <p:cNvPr id="6" name="Scale 4 heading"/>
           <p:cNvSpPr txBox="1"/>
           <p:nvPr/>
         </p:nvSpPr>
         <p:spPr>
           <a:xfrm>
-            <a:off x="8467344" y="3017520"/>
-            <a:ext cx="2770632" cy="457200"/>
+            <a:off x="1508760" y="4297680"/>
+            <a:ext cx="10058400" cy="411480"/>
           </a:xfrm>
           <a:prstGeom prst="rect">
             <a:avLst/>
@@ -10952,7 +11072,7 @@
                 <a:ea typeface="Cambria" pitchFamily="34" charset="-122"/>
                 <a:cs typeface="Cambria" pitchFamily="34" charset="-120"/>
               </a:rPr>
-              <a:t>One code, any unit</a:t>
+              <a:t>Fleet-ready</a:t>
             </a:r>
             <a:endParaRPr lang="en-US" sz="2200" dirty="0"/>
           </a:p>
@@ -10960,14 +11080,14 @@
       </p:sp>
       <p:sp>
         <p:nvSpPr>
-          <p:cNvPr id="17" name="Text 12"/>
+          <p:cNvPr id="7" name="Scale 4 body"/>
           <p:cNvSpPr txBox="1"/>
           <p:nvPr/>
         </p:nvSpPr>
         <p:spPr>
           <a:xfrm>
-            <a:off x="8467344" y="3566160"/>
-            <a:ext cx="2770632" cy="1463040"/>
+            <a:off x="1508760" y="4709160"/>
+            <a:ext cx="10058400" cy="365760"/>
           </a:xfrm>
           <a:prstGeom prst="rect">
             <a:avLst/>
@@ -10983,95 +11103,14 @@
               <a:buNone/>
             </a:pPr>
             <a:r>
-              <a:rPr lang="en-US" sz="1500" dirty="0">
+              <a:rPr lang="en-US" sz="1600" dirty="0">
                 <a:solidFill>
                   <a:schemeClr val="bg2"/>
                 </a:solidFill>
               </a:rPr>
-              <a:t>Every twin shares the same 3D engine, protection rules and dashboard. Twinning the next transformer costs zero fabrication.</a:t>
+              <a:t>Every reading and API call is scoped to a transformer ID, so one server can host many twins.</a:t>
             </a:r>
             <a:endParaRPr lang="en-US" sz="1500" dirty="0"/>
-          </a:p>
-        </p:txBody>
-      </p:sp>
-      <p:sp>
-        <p:nvSpPr>
-          <p:cNvPr id="18" name="Text 13"/>
-          <p:cNvSpPr txBox="1"/>
-          <p:nvPr/>
-        </p:nvSpPr>
-        <p:spPr>
-          <a:xfrm>
-            <a:off x="548640" y="5486400"/>
-            <a:ext cx="11094415" cy="457200"/>
-          </a:xfrm>
-          <a:prstGeom prst="rect">
-            <a:avLst/>
-          </a:prstGeom>
-          <a:noFill/>
-          <a:ln/>
-        </p:spPr>
-        <p:txBody>
-          <a:bodyPr wrap="square" lIns="0" tIns="0" rIns="0" bIns="0" rtlCol="0" anchor="t"/>
-          <a:lstStyle/>
-          <a:p>
-            <a:pPr marL="0" indent="0">
-              <a:buNone/>
-            </a:pPr>
-            <a:r>
-              <a:rPr lang="en-US" sz="1600" i="1" dirty="0">
-                <a:solidFill>
-                  <a:schemeClr val="bg1"/>
-                </a:solidFill>
-              </a:rPr>
-              <a:t>A physical model twins one transformer. Software twins the whole fleet.</a:t>
-            </a:r>
-            <a:endParaRPr lang="en-US" sz="1600" dirty="0"/>
-          </a:p>
-        </p:txBody>
-      </p:sp>
-      <p:sp>
-        <p:nvSpPr>
-          <p:cNvPr id="25" name="Slide Number Placeholder 0"/>
-          <p:cNvSpPr>
-            <a:spLocks noGrp="1"/>
-          </p:cNvSpPr>
-          <p:nvPr>
-            <p:ph type="sldNum" sz="quarter" idx="4294967295"/>
-          </p:nvPr>
-        </p:nvSpPr>
-        <p:spPr>
-          <a:xfrm>
-            <a:off x="11094415" y="6446520"/>
-            <a:ext cx="548640" cy="274320"/>
-          </a:xfrm>
-          <a:prstGeom prst="rect">
-            <a:avLst/>
-          </a:prstGeom>
-          <a:extLst>
-            <a:ext uri="{C572A759-6A51-4108-AA02-DFA0A04FC94B}">
-              <ma14:wrappingTextBoxFlag xmlns:ma14="http://schemas.microsoft.com/office/mac/drawingml/2011/main" xmlns="" val="0"/>
-            </a:ext>
-          </a:extLst>
-        </p:spPr>
-        <p:txBody>
-          <a:bodyPr lIns="0" tIns="0" rIns="0" bIns="0"/>
-          <a:lstStyle>
-            <a:lvl1pPr>
-              <a:defRPr sz="1000">
-                <a:solidFill>
-                  <a:schemeClr val="bg2"/>
-                </a:solidFill>
-              </a:defRPr>
-            </a:lvl1pPr>
-          </a:lstStyle>
-          <a:p>
-            <a:pPr algn="r"/>
-            <a:fld id="{F7021451-1387-4CA6-816F-3879F97B5CBC}" type="slidenum">
-              <a:rPr lang="en-US" b="0"/>
-              <a:t>4</a:t>
-            </a:fld>
-            <a:endParaRPr lang="en-US"/>
           </a:p>
         </p:txBody>
       </p:sp>
@@ -12299,24 +12338,17 @@
             <a:tbl>
               <a:tblPr/>
               <a:tblGrid>
-                <a:gridCol w="2926080">
+                <a:gridCol w="3600000">
                   <a:extLst>
                     <a:ext uri="{9D8B030D-6E8A-4147-A177-3AD203B41FA5}">
                       <a16:colId xmlns:a16="http://schemas.microsoft.com/office/drawing/2014/main" val="20000"/>
                     </a:ext>
                   </a:extLst>
                 </a:gridCol>
-                <a:gridCol w="5852160">
+                <a:gridCol w="7491672">
                   <a:extLst>
                     <a:ext uri="{9D8B030D-6E8A-4147-A177-3AD203B41FA5}">
                       <a16:colId xmlns:a16="http://schemas.microsoft.com/office/drawing/2014/main" val="20001"/>
-                    </a:ext>
-                  </a:extLst>
-                </a:gridCol>
-                <a:gridCol w="2313432">
-                  <a:extLst>
-                    <a:ext uri="{9D8B030D-6E8A-4147-A177-3AD203B41FA5}">
-                      <a16:colId xmlns:a16="http://schemas.microsoft.com/office/drawing/2014/main" val="20002"/>
                     </a:ext>
                   </a:extLst>
                 </a:gridCol>
@@ -12374,43 +12406,6 @@
                           </a:solidFill>
                         </a:rPr>
                         <a:t>Real-world instrument</a:t>
-                      </a:r>
-                      <a:endParaRPr lang="en-US" sz="1400" dirty="0"/>
-                    </a:p>
-                  </a:txBody>
-                  <a:tcPr marL="137160" marR="137160" marT="0" marB="0" anchor="ctr">
-                    <a:lnL w="0" cap="flat" cmpd="sng" algn="ctr">
-                      <a:noFill/>
-                    </a:lnL>
-                    <a:lnR w="0" cap="flat" cmpd="sng" algn="ctr">
-                      <a:noFill/>
-                    </a:lnR>
-                    <a:lnT w="0" cap="flat" cmpd="sng" algn="ctr">
-                      <a:noFill/>
-                    </a:lnT>
-                    <a:lnB w="0" cap="flat" cmpd="sng" algn="ctr">
-                      <a:noFill/>
-                    </a:lnB>
-                    <a:solidFill>
-                      <a:schemeClr val="accent6"/>
-                    </a:solidFill>
-                  </a:tcPr>
-                </a:tc>
-                <a:tc>
-                  <a:txBody>
-                    <a:bodyPr/>
-                    <a:lstStyle/>
-                    <a:p>
-                      <a:pPr marL="0" indent="0">
-                        <a:buNone/>
-                      </a:pPr>
-                      <a:r>
-                        <a:rPr lang="en-US" sz="1400" b="1" dirty="0">
-                          <a:solidFill>
-                            <a:schemeClr val="accent1"/>
-                          </a:solidFill>
-                        </a:rPr>
-                        <a:t>On a real DT?</a:t>
                       </a:r>
                       <a:endParaRPr lang="en-US" sz="1400" dirty="0"/>
                     </a:p>
@@ -12514,43 +12509,6 @@
                     </a:solidFill>
                   </a:tcPr>
                 </a:tc>
-                <a:tc>
-                  <a:txBody>
-                    <a:bodyPr/>
-                    <a:lstStyle/>
-                    <a:p>
-                      <a:pPr marL="0" indent="0">
-                        <a:buNone/>
-                      </a:pPr>
-                      <a:r>
-                        <a:rPr lang="en-US" sz="1400" dirty="0">
-                          <a:solidFill>
-                            <a:schemeClr val="accent1"/>
-                          </a:solidFill>
-                        </a:rPr>
-                        <a:t>Yes</a:t>
-                      </a:r>
-                      <a:endParaRPr lang="en-US" sz="1400" dirty="0"/>
-                    </a:p>
-                  </a:txBody>
-                  <a:tcPr marL="137160" marR="137160" marT="0" marB="0" anchor="ctr">
-                    <a:lnL w="0" cap="flat" cmpd="sng" algn="ctr">
-                      <a:noFill/>
-                    </a:lnL>
-                    <a:lnR w="0" cap="flat" cmpd="sng" algn="ctr">
-                      <a:noFill/>
-                    </a:lnR>
-                    <a:lnT w="0" cap="flat" cmpd="sng" algn="ctr">
-                      <a:noFill/>
-                    </a:lnT>
-                    <a:lnB w="0" cap="flat" cmpd="sng" algn="ctr">
-                      <a:noFill/>
-                    </a:lnB>
-                    <a:solidFill>
-                      <a:schemeClr val="tx2"/>
-                    </a:solidFill>
-                  </a:tcPr>
-                </a:tc>
                 <a:extLst>
                   <a:ext uri="{0D108BD9-81ED-4DB2-BD59-A6C34878D82A}">
                     <a16:rowId xmlns:a16="http://schemas.microsoft.com/office/drawing/2014/main" val="10001"/>
@@ -12610,43 +12568,6 @@
                           </a:solidFill>
                         </a:rPr>
                         <a:t>11 kV CT and PT with a meter or relay</a:t>
-                      </a:r>
-                      <a:endParaRPr lang="en-US" sz="1400" dirty="0"/>
-                    </a:p>
-                  </a:txBody>
-                  <a:tcPr marL="137160" marR="137160" marT="0" marB="0" anchor="ctr">
-                    <a:lnL w="0" cap="flat" cmpd="sng" algn="ctr">
-                      <a:noFill/>
-                    </a:lnL>
-                    <a:lnR w="0" cap="flat" cmpd="sng" algn="ctr">
-                      <a:noFill/>
-                    </a:lnR>
-                    <a:lnT w="0" cap="flat" cmpd="sng" algn="ctr">
-                      <a:noFill/>
-                    </a:lnT>
-                    <a:lnB w="0" cap="flat" cmpd="sng" algn="ctr">
-                      <a:noFill/>
-                    </a:lnB>
-                    <a:solidFill>
-                      <a:schemeClr val="tx1"/>
-                    </a:solidFill>
-                  </a:tcPr>
-                </a:tc>
-                <a:tc>
-                  <a:txBody>
-                    <a:bodyPr/>
-                    <a:lstStyle/>
-                    <a:p>
-                      <a:pPr marL="0" indent="0">
-                        <a:buNone/>
-                      </a:pPr>
-                      <a:r>
-                        <a:rPr lang="en-US" sz="1400" dirty="0">
-                          <a:solidFill>
-                            <a:schemeClr val="accent1"/>
-                          </a:solidFill>
-                        </a:rPr>
-                        <a:t>At the feeder / RMU</a:t>
                       </a:r>
                       <a:endParaRPr lang="en-US" sz="1400" dirty="0"/>
                     </a:p>
@@ -12750,43 +12671,6 @@
                     </a:solidFill>
                   </a:tcPr>
                 </a:tc>
-                <a:tc>
-                  <a:txBody>
-                    <a:bodyPr/>
-                    <a:lstStyle/>
-                    <a:p>
-                      <a:pPr marL="0" indent="0">
-                        <a:buNone/>
-                      </a:pPr>
-                      <a:r>
-                        <a:rPr lang="en-US" sz="1400" dirty="0">
-                          <a:solidFill>
-                            <a:schemeClr val="accent1"/>
-                          </a:solidFill>
-                        </a:rPr>
-                        <a:t>Survey only</a:t>
-                      </a:r>
-                      <a:endParaRPr lang="en-US" sz="1400" dirty="0"/>
-                    </a:p>
-                  </a:txBody>
-                  <a:tcPr marL="137160" marR="137160" marT="0" marB="0" anchor="ctr">
-                    <a:lnL w="0" cap="flat" cmpd="sng" algn="ctr">
-                      <a:noFill/>
-                    </a:lnL>
-                    <a:lnR w="0" cap="flat" cmpd="sng" algn="ctr">
-                      <a:noFill/>
-                    </a:lnR>
-                    <a:lnT w="0" cap="flat" cmpd="sng" algn="ctr">
-                      <a:noFill/>
-                    </a:lnT>
-                    <a:lnB w="0" cap="flat" cmpd="sng" algn="ctr">
-                      <a:noFill/>
-                    </a:lnB>
-                    <a:solidFill>
-                      <a:schemeClr val="tx2"/>
-                    </a:solidFill>
-                  </a:tcPr>
-                </a:tc>
                 <a:extLst>
                   <a:ext uri="{0D108BD9-81ED-4DB2-BD59-A6C34878D82A}">
                     <a16:rowId xmlns:a16="http://schemas.microsoft.com/office/drawing/2014/main" val="10003"/>
@@ -12846,43 +12730,6 @@
                           </a:solidFill>
                         </a:rPr>
                         <a:t>OTI dial, or PT100 in a thermowell with 4–20 mA</a:t>
-                      </a:r>
-                      <a:endParaRPr lang="en-US" sz="1400" dirty="0"/>
-                    </a:p>
-                  </a:txBody>
-                  <a:tcPr marL="137160" marR="137160" marT="0" marB="0" anchor="ctr">
-                    <a:lnL w="0" cap="flat" cmpd="sng" algn="ctr">
-                      <a:noFill/>
-                    </a:lnL>
-                    <a:lnR w="0" cap="flat" cmpd="sng" algn="ctr">
-                      <a:noFill/>
-                    </a:lnR>
-                    <a:lnT w="0" cap="flat" cmpd="sng" algn="ctr">
-                      <a:noFill/>
-                    </a:lnT>
-                    <a:lnB w="0" cap="flat" cmpd="sng" algn="ctr">
-                      <a:noFill/>
-                    </a:lnB>
-                    <a:solidFill>
-                      <a:schemeClr val="tx1"/>
-                    </a:solidFill>
-                  </a:tcPr>
-                </a:tc>
-                <a:tc>
-                  <a:txBody>
-                    <a:bodyPr/>
-                    <a:lstStyle/>
-                    <a:p>
-                      <a:pPr marL="0" indent="0">
-                        <a:buNone/>
-                      </a:pPr>
-                      <a:r>
-                        <a:rPr lang="en-US" sz="1400" dirty="0">
-                          <a:solidFill>
-                            <a:schemeClr val="accent1"/>
-                          </a:solidFill>
-                        </a:rPr>
-                        <a:t>Usually</a:t>
                       </a:r>
                       <a:endParaRPr lang="en-US" sz="1400" dirty="0"/>
                     </a:p>
@@ -12986,43 +12833,6 @@
                     </a:solidFill>
                   </a:tcPr>
                 </a:tc>
-                <a:tc>
-                  <a:txBody>
-                    <a:bodyPr/>
-                    <a:lstStyle/>
-                    <a:p>
-                      <a:pPr marL="0" indent="0">
-                        <a:buNone/>
-                      </a:pPr>
-                      <a:r>
-                        <a:rPr lang="en-US" sz="1400" dirty="0">
-                          <a:solidFill>
-                            <a:schemeClr val="accent1"/>
-                          </a:solidFill>
-                        </a:rPr>
-                        <a:t>Uncommon &lt; 1 MVA</a:t>
-                      </a:r>
-                      <a:endParaRPr lang="en-US" sz="1400" dirty="0"/>
-                    </a:p>
-                  </a:txBody>
-                  <a:tcPr marL="137160" marR="137160" marT="0" marB="0" anchor="ctr">
-                    <a:lnL w="0" cap="flat" cmpd="sng" algn="ctr">
-                      <a:noFill/>
-                    </a:lnL>
-                    <a:lnR w="0" cap="flat" cmpd="sng" algn="ctr">
-                      <a:noFill/>
-                    </a:lnR>
-                    <a:lnT w="0" cap="flat" cmpd="sng" algn="ctr">
-                      <a:noFill/>
-                    </a:lnT>
-                    <a:lnB w="0" cap="flat" cmpd="sng" algn="ctr">
-                      <a:noFill/>
-                    </a:lnB>
-                    <a:solidFill>
-                      <a:schemeClr val="tx2"/>
-                    </a:solidFill>
-                  </a:tcPr>
-                </a:tc>
                 <a:extLst>
                   <a:ext uri="{0D108BD9-81ED-4DB2-BD59-A6C34878D82A}">
                     <a16:rowId xmlns:a16="http://schemas.microsoft.com/office/drawing/2014/main" val="10005"/>
@@ -13082,43 +12892,6 @@
                           </a:solidFill>
                         </a:rPr>
                         <a:t>Fibre-optic probes cast into the winding</a:t>
-                      </a:r>
-                      <a:endParaRPr lang="en-US" sz="1400" dirty="0"/>
-                    </a:p>
-                  </a:txBody>
-                  <a:tcPr marL="137160" marR="137160" marT="0" marB="0" anchor="ctr">
-                    <a:lnL w="0" cap="flat" cmpd="sng" algn="ctr">
-                      <a:noFill/>
-                    </a:lnL>
-                    <a:lnR w="0" cap="flat" cmpd="sng" algn="ctr">
-                      <a:noFill/>
-                    </a:lnR>
-                    <a:lnT w="0" cap="flat" cmpd="sng" algn="ctr">
-                      <a:noFill/>
-                    </a:lnT>
-                    <a:lnB w="0" cap="flat" cmpd="sng" algn="ctr">
-                      <a:noFill/>
-                    </a:lnB>
-                    <a:solidFill>
-                      <a:schemeClr val="tx1"/>
-                    </a:solidFill>
-                  </a:tcPr>
-                </a:tc>
-                <a:tc>
-                  <a:txBody>
-                    <a:bodyPr/>
-                    <a:lstStyle/>
-                    <a:p>
-                      <a:pPr marL="0" indent="0">
-                        <a:buNone/>
-                      </a:pPr>
-                      <a:r>
-                        <a:rPr lang="en-US" sz="1400" dirty="0">
-                          <a:solidFill>
-                            <a:schemeClr val="accent1"/>
-                          </a:solidFill>
-                        </a:rPr>
-                        <a:t>Test units only</a:t>
                       </a:r>
                       <a:endParaRPr lang="en-US" sz="1400" dirty="0"/>
                     </a:p>
@@ -13222,43 +12995,6 @@
                     </a:solidFill>
                   </a:tcPr>
                 </a:tc>
-                <a:tc>
-                  <a:txBody>
-                    <a:bodyPr/>
-                    <a:lstStyle/>
-                    <a:p>
-                      <a:pPr marL="0" indent="0">
-                        <a:buNone/>
-                      </a:pPr>
-                      <a:r>
-                        <a:rPr lang="en-US" sz="1400" dirty="0">
-                          <a:solidFill>
-                            <a:schemeClr val="accent1"/>
-                          </a:solidFill>
-                        </a:rPr>
-                        <a:t>With a DTMU</a:t>
-                      </a:r>
-                      <a:endParaRPr lang="en-US" sz="1400" dirty="0"/>
-                    </a:p>
-                  </a:txBody>
-                  <a:tcPr marL="137160" marR="137160" marT="0" marB="0" anchor="ctr">
-                    <a:lnL w="0" cap="flat" cmpd="sng" algn="ctr">
-                      <a:noFill/>
-                    </a:lnL>
-                    <a:lnR w="0" cap="flat" cmpd="sng" algn="ctr">
-                      <a:noFill/>
-                    </a:lnR>
-                    <a:lnT w="0" cap="flat" cmpd="sng" algn="ctr">
-                      <a:noFill/>
-                    </a:lnT>
-                    <a:lnB w="0" cap="flat" cmpd="sng" algn="ctr">
-                      <a:noFill/>
-                    </a:lnB>
-                    <a:solidFill>
-                      <a:schemeClr val="tx2"/>
-                    </a:solidFill>
-                  </a:tcPr>
-                </a:tc>
                 <a:extLst>
                   <a:ext uri="{0D108BD9-81ED-4DB2-BD59-A6C34878D82A}">
                     <a16:rowId xmlns:a16="http://schemas.microsoft.com/office/drawing/2014/main" val="10007"/>
@@ -13318,43 +13054,6 @@
                           </a:solidFill>
                         </a:rPr>
                         <a:t>Pressure-relief valve; pressure transducer</a:t>
-                      </a:r>
-                      <a:endParaRPr lang="en-US" sz="1400" dirty="0"/>
-                    </a:p>
-                  </a:txBody>
-                  <a:tcPr marL="137160" marR="137160" marT="0" marB="0" anchor="ctr">
-                    <a:lnL w="0" cap="flat" cmpd="sng" algn="ctr">
-                      <a:noFill/>
-                    </a:lnL>
-                    <a:lnR w="0" cap="flat" cmpd="sng" algn="ctr">
-                      <a:noFill/>
-                    </a:lnR>
-                    <a:lnT w="0" cap="flat" cmpd="sng" algn="ctr">
-                      <a:noFill/>
-                    </a:lnT>
-                    <a:lnB w="0" cap="flat" cmpd="sng" algn="ctr">
-                      <a:noFill/>
-                    </a:lnB>
-                    <a:solidFill>
-                      <a:schemeClr val="tx1"/>
-                    </a:solidFill>
-                  </a:tcPr>
-                </a:tc>
-                <a:tc>
-                  <a:txBody>
-                    <a:bodyPr/>
-                    <a:lstStyle/>
-                    <a:p>
-                      <a:pPr marL="0" indent="0">
-                        <a:buNone/>
-                      </a:pPr>
-                      <a:r>
-                        <a:rPr lang="en-US" sz="1400" dirty="0">
-                          <a:solidFill>
-                            <a:schemeClr val="accent1"/>
-                          </a:solidFill>
-                        </a:rPr>
-                        <a:t>PRV common</a:t>
                       </a:r>
                       <a:endParaRPr lang="en-US" sz="1400" dirty="0"/>
                     </a:p>
@@ -13436,43 +13135,6 @@
                           </a:solidFill>
                         </a:rPr>
                         <a:t>Magnetic oil-level gauge with low-level switch</a:t>
-                      </a:r>
-                      <a:endParaRPr lang="en-US" sz="1400" dirty="0"/>
-                    </a:p>
-                  </a:txBody>
-                  <a:tcPr marL="137160" marR="137160" marT="0" marB="0" anchor="ctr">
-                    <a:lnL w="0" cap="flat" cmpd="sng" algn="ctr">
-                      <a:noFill/>
-                    </a:lnL>
-                    <a:lnR w="0" cap="flat" cmpd="sng" algn="ctr">
-                      <a:noFill/>
-                    </a:lnR>
-                    <a:lnT w="0" cap="flat" cmpd="sng" algn="ctr">
-                      <a:noFill/>
-                    </a:lnT>
-                    <a:lnB w="0" cap="flat" cmpd="sng" algn="ctr">
-                      <a:noFill/>
-                    </a:lnB>
-                    <a:solidFill>
-                      <a:schemeClr val="tx2"/>
-                    </a:solidFill>
-                  </a:tcPr>
-                </a:tc>
-                <a:tc>
-                  <a:txBody>
-                    <a:bodyPr/>
-                    <a:lstStyle/>
-                    <a:p>
-                      <a:pPr marL="0" indent="0">
-                        <a:buNone/>
-                      </a:pPr>
-                      <a:r>
-                        <a:rPr lang="en-US" sz="1400" dirty="0">
-                          <a:solidFill>
-                            <a:schemeClr val="accent1"/>
-                          </a:solidFill>
-                        </a:rPr>
-                        <a:t>Yes</a:t>
                       </a:r>
                       <a:endParaRPr lang="en-US" sz="1400" dirty="0"/>
                     </a:p>
